--- a/assets/pptx/catalog-525.pptx
+++ b/assets/pptx/catalog-525.pptx
@@ -3261,7 +3261,7 @@
                 <a:ea typeface="Ebrima"/>
                 <a:cs typeface="Ebrima"/>
               </a:rPr>
-              <a:t>ግራ አልጋባም ጌታ ሆይ አንተ መልካም ነህ በሰው አይምሮ መች ትለካለህ (4x)</a:t>
+              <a:t>ግራ አልጋባም ጌታ ሆይ አንተ መልካም ነህ በሰው አይምሮ መች ትለካለህ 4x</a:t>
             </a:r>
           </a:p>
         </p:txBody>
@@ -3462,7 +3462,7 @@
                 <a:ea typeface="Ebrima"/>
                 <a:cs typeface="Ebrima"/>
               </a:rPr>
-              <a:t>እግዚአብሔር ያለው (2x)</a:t>
+              <a:t>እግዚአብሔር ያለው 2x</a:t>
             </a:r>
           </a:p>
         </p:txBody>
@@ -3730,7 +3730,7 @@
                 <a:ea typeface="Ebrima"/>
                 <a:cs typeface="Ebrima"/>
               </a:rPr>
-              <a:t>አምላክ በእኔ ይሆናል ያለው (2x)</a:t>
+              <a:t>አምላክ በእኔ ይሆናል ያለው 2x</a:t>
             </a:r>
           </a:p>
         </p:txBody>
@@ -3797,7 +3797,7 @@
                 <a:ea typeface="Ebrima"/>
                 <a:cs typeface="Ebrima"/>
               </a:rPr>
-              <a:t>ግራ አልጋባም ጌታ ሆይ አንተ መልካም ነህ በሰው አይምሮ መች ትለካለህ (4x)</a:t>
+              <a:t>ግራ አልጋባም ጌታ ሆይ አንተ መልካም ነህ በሰው አይምሮ መች ትለካለህ 4x</a:t>
             </a:r>
           </a:p>
         </p:txBody>
@@ -3931,7 +3931,7 @@
                 <a:ea typeface="Ebrima"/>
                 <a:cs typeface="Ebrima"/>
               </a:rPr>
-              <a:t>ግራ አልጋባም ጌታ ሆይ አንተ መልካም ነህ በሰው አይምሮ መች ትለካለህ (4x)</a:t>
+              <a:t>ግራ አልጋባም ጌታ ሆይ አንተ መልካም ነህ በሰው አይምሮ መች ትለካለህ 4x</a:t>
             </a:r>
           </a:p>
         </p:txBody>
@@ -4132,7 +4132,7 @@
                 <a:ea typeface="Ebrima"/>
                 <a:cs typeface="Ebrima"/>
               </a:rPr>
-              <a:t>አምላክ በእኔ ይሆናል ያለው (2x)</a:t>
+              <a:t>አምላክ በእኔ ይሆናል ያለው 2x</a:t>
             </a:r>
           </a:p>
         </p:txBody>
@@ -4333,7 +4333,7 @@
                 <a:ea typeface="Ebrima"/>
                 <a:cs typeface="Ebrima"/>
               </a:rPr>
-              <a:t>አንተ የምታውቀው (2x)</a:t>
+              <a:t>አንተ የምታውቀው 2x</a:t>
             </a:r>
           </a:p>
         </p:txBody>
@@ -4601,7 +4601,7 @@
                 <a:ea typeface="Ebrima"/>
                 <a:cs typeface="Ebrima"/>
               </a:rPr>
-              <a:t>አምላክ በእኔ ይሆናል ያለው (2x)</a:t>
+              <a:t>አምላክ በእኔ ይሆናል ያለው 2x</a:t>
             </a:r>
           </a:p>
         </p:txBody>
